--- a/PPT/Backend.pptx
+++ b/PPT/Backend.pptx
@@ -10,6 +10,8 @@
     <p:sldId id="258" r:id="rId4"/>
     <p:sldId id="259" r:id="rId5"/>
     <p:sldId id="260" r:id="rId6"/>
+    <p:sldId id="261" r:id="rId7"/>
+    <p:sldId id="262" r:id="rId8"/>
   </p:sldIdLst>
   <p:sldSz cx="12192000" cy="6858000"/>
   <p:notesSz cx="6858000" cy="9144000"/>
@@ -108,6 +110,11 @@
       </a:defRPr>
     </a:lvl9pPr>
   </p:defaultTextStyle>
+  <p:extLst>
+    <p:ext uri="{EFAFB233-063F-42B5-8137-9DF3F51BA10A}">
+      <p15:sldGuideLst xmlns:p15="http://schemas.microsoft.com/office/powerpoint/2012/main"/>
+    </p:ext>
+  </p:extLst>
 </p:presentation>
 </file>
 
@@ -242,7 +249,7 @@
           <a:p>
             <a:fld id="{595084B0-937B-409B-B793-26CDA194384B}" type="datetimeFigureOut">
               <a:rPr lang="hu-HU" smtClean="0"/>
-              <a:t>2026.04.15</a:t>
+              <a:t>2026.04.16</a:t>
             </a:fld>
             <a:endParaRPr lang="hu-HU"/>
           </a:p>
@@ -412,7 +419,7 @@
           <a:p>
             <a:fld id="{595084B0-937B-409B-B793-26CDA194384B}" type="datetimeFigureOut">
               <a:rPr lang="hu-HU" smtClean="0"/>
-              <a:t>2026.04.15</a:t>
+              <a:t>2026.04.16</a:t>
             </a:fld>
             <a:endParaRPr lang="hu-HU"/>
           </a:p>
@@ -592,7 +599,7 @@
           <a:p>
             <a:fld id="{595084B0-937B-409B-B793-26CDA194384B}" type="datetimeFigureOut">
               <a:rPr lang="hu-HU" smtClean="0"/>
-              <a:t>2026.04.15</a:t>
+              <a:t>2026.04.16</a:t>
             </a:fld>
             <a:endParaRPr lang="hu-HU"/>
           </a:p>
@@ -762,7 +769,7 @@
           <a:p>
             <a:fld id="{595084B0-937B-409B-B793-26CDA194384B}" type="datetimeFigureOut">
               <a:rPr lang="hu-HU" smtClean="0"/>
-              <a:t>2026.04.15</a:t>
+              <a:t>2026.04.16</a:t>
             </a:fld>
             <a:endParaRPr lang="hu-HU"/>
           </a:p>
@@ -1008,7 +1015,7 @@
           <a:p>
             <a:fld id="{595084B0-937B-409B-B793-26CDA194384B}" type="datetimeFigureOut">
               <a:rPr lang="hu-HU" smtClean="0"/>
-              <a:t>2026.04.15</a:t>
+              <a:t>2026.04.16</a:t>
             </a:fld>
             <a:endParaRPr lang="hu-HU"/>
           </a:p>
@@ -1240,7 +1247,7 @@
           <a:p>
             <a:fld id="{595084B0-937B-409B-B793-26CDA194384B}" type="datetimeFigureOut">
               <a:rPr lang="hu-HU" smtClean="0"/>
-              <a:t>2026.04.15</a:t>
+              <a:t>2026.04.16</a:t>
             </a:fld>
             <a:endParaRPr lang="hu-HU"/>
           </a:p>
@@ -1607,7 +1614,7 @@
           <a:p>
             <a:fld id="{595084B0-937B-409B-B793-26CDA194384B}" type="datetimeFigureOut">
               <a:rPr lang="hu-HU" smtClean="0"/>
-              <a:t>2026.04.15</a:t>
+              <a:t>2026.04.16</a:t>
             </a:fld>
             <a:endParaRPr lang="hu-HU"/>
           </a:p>
@@ -1725,7 +1732,7 @@
           <a:p>
             <a:fld id="{595084B0-937B-409B-B793-26CDA194384B}" type="datetimeFigureOut">
               <a:rPr lang="hu-HU" smtClean="0"/>
-              <a:t>2026.04.15</a:t>
+              <a:t>2026.04.16</a:t>
             </a:fld>
             <a:endParaRPr lang="hu-HU"/>
           </a:p>
@@ -1820,7 +1827,7 @@
           <a:p>
             <a:fld id="{595084B0-937B-409B-B793-26CDA194384B}" type="datetimeFigureOut">
               <a:rPr lang="hu-HU" smtClean="0"/>
-              <a:t>2026.04.15</a:t>
+              <a:t>2026.04.16</a:t>
             </a:fld>
             <a:endParaRPr lang="hu-HU"/>
           </a:p>
@@ -2097,7 +2104,7 @@
           <a:p>
             <a:fld id="{595084B0-937B-409B-B793-26CDA194384B}" type="datetimeFigureOut">
               <a:rPr lang="hu-HU" smtClean="0"/>
-              <a:t>2026.04.15</a:t>
+              <a:t>2026.04.16</a:t>
             </a:fld>
             <a:endParaRPr lang="hu-HU"/>
           </a:p>
@@ -2354,7 +2361,7 @@
           <a:p>
             <a:fld id="{595084B0-937B-409B-B793-26CDA194384B}" type="datetimeFigureOut">
               <a:rPr lang="hu-HU" smtClean="0"/>
-              <a:t>2026.04.15</a:t>
+              <a:t>2026.04.16</a:t>
             </a:fld>
             <a:endParaRPr lang="hu-HU"/>
           </a:p>
@@ -2567,7 +2574,7 @@
           <a:p>
             <a:fld id="{595084B0-937B-409B-B793-26CDA194384B}" type="datetimeFigureOut">
               <a:rPr lang="hu-HU" smtClean="0"/>
-              <a:t>2026.04.15</a:t>
+              <a:t>2026.04.16</a:t>
             </a:fld>
             <a:endParaRPr lang="hu-HU"/>
           </a:p>
@@ -4036,6 +4043,320 @@
 </p:sld>
 </file>
 
+<file path=ppt/slides/slide6.xml><?xml version="1.0" encoding="utf-8"?>
+<p:sld xmlns:a="http://schemas.openxmlformats.org/drawingml/2006/main" xmlns:r="http://schemas.openxmlformats.org/officeDocument/2006/relationships" xmlns:p="http://schemas.openxmlformats.org/presentationml/2006/main">
+  <p:cSld>
+    <p:spTree>
+      <p:nvGrpSpPr>
+        <p:cNvPr id="1" name=""/>
+        <p:cNvGrpSpPr/>
+        <p:nvPr/>
+      </p:nvGrpSpPr>
+      <p:grpSpPr>
+        <a:xfrm>
+          <a:off x="0" y="0"/>
+          <a:ext cx="0" cy="0"/>
+          <a:chOff x="0" y="0"/>
+          <a:chExt cx="0" cy="0"/>
+        </a:xfrm>
+      </p:grpSpPr>
+      <p:sp>
+        <p:nvSpPr>
+          <p:cNvPr id="2" name="Cím 1">
+            <a:extLst>
+              <a:ext uri="{FF2B5EF4-FFF2-40B4-BE49-F238E27FC236}">
+                <a16:creationId xmlns:a16="http://schemas.microsoft.com/office/drawing/2014/main" id="{448F32FB-25A8-459D-B85E-58DB7C04907D}"/>
+              </a:ext>
+            </a:extLst>
+          </p:cNvPr>
+          <p:cNvSpPr>
+            <a:spLocks noGrp="1"/>
+          </p:cNvSpPr>
+          <p:nvPr>
+            <p:ph type="title"/>
+          </p:nvPr>
+        </p:nvSpPr>
+        <p:spPr/>
+        <p:txBody>
+          <a:bodyPr/>
+          <a:lstStyle/>
+          <a:p>
+            <a:r>
+              <a:rPr lang="hu-HU" dirty="0" err="1"/>
+              <a:t>Validálás</a:t>
+            </a:r>
+            <a:endParaRPr lang="hu-HU" dirty="0"/>
+          </a:p>
+        </p:txBody>
+      </p:sp>
+      <p:sp>
+        <p:nvSpPr>
+          <p:cNvPr id="3" name="Tartalom helye 2">
+            <a:extLst>
+              <a:ext uri="{FF2B5EF4-FFF2-40B4-BE49-F238E27FC236}">
+                <a16:creationId xmlns:a16="http://schemas.microsoft.com/office/drawing/2014/main" id="{48A03EDF-654E-4589-922A-44039C66E18F}"/>
+              </a:ext>
+            </a:extLst>
+          </p:cNvPr>
+          <p:cNvSpPr>
+            <a:spLocks noGrp="1"/>
+          </p:cNvSpPr>
+          <p:nvPr>
+            <p:ph idx="1"/>
+          </p:nvPr>
+        </p:nvSpPr>
+        <p:spPr/>
+        <p:txBody>
+          <a:bodyPr/>
+          <a:lstStyle/>
+          <a:p>
+            <a:r>
+              <a:rPr lang="hu-HU" dirty="0" err="1"/>
+              <a:t>Laravel</a:t>
+            </a:r>
+            <a:r>
+              <a:rPr lang="hu-HU" dirty="0"/>
+              <a:t> </a:t>
+            </a:r>
+            <a:r>
+              <a:rPr lang="hu-HU" dirty="0" err="1"/>
+              <a:t>request</a:t>
+            </a:r>
+            <a:r>
+              <a:rPr lang="hu-HU" dirty="0"/>
+              <a:t>:</a:t>
+            </a:r>
+          </a:p>
+          <a:p>
+            <a:r>
+              <a:rPr lang="hu-HU" dirty="0"/>
+              <a:t> 	- 422 Hibakód</a:t>
+            </a:r>
+            <a:br>
+              <a:rPr lang="hu-HU" dirty="0"/>
+            </a:br>
+            <a:r>
+              <a:rPr lang="hu-HU" dirty="0"/>
+              <a:t>	- felsorolt szabályok teljesülnie kell</a:t>
+            </a:r>
+          </a:p>
+        </p:txBody>
+      </p:sp>
+      <p:pic>
+        <p:nvPicPr>
+          <p:cNvPr id="5" name="Kép 4">
+            <a:extLst>
+              <a:ext uri="{FF2B5EF4-FFF2-40B4-BE49-F238E27FC236}">
+                <a16:creationId xmlns:a16="http://schemas.microsoft.com/office/drawing/2014/main" id="{4524D4F1-D66E-469B-90CB-8A83569CBD0E}"/>
+              </a:ext>
+            </a:extLst>
+          </p:cNvPr>
+          <p:cNvPicPr>
+            <a:picLocks noChangeAspect="1"/>
+          </p:cNvPicPr>
+          <p:nvPr/>
+        </p:nvPicPr>
+        <p:blipFill>
+          <a:blip r:embed="rId2">
+            <a:extLst>
+              <a:ext uri="{28A0092B-C50C-407E-A947-70E740481C1C}">
+                <a14:useLocalDpi xmlns:a14="http://schemas.microsoft.com/office/drawing/2010/main" val="0"/>
+              </a:ext>
+            </a:extLst>
+          </a:blip>
+          <a:stretch>
+            <a:fillRect/>
+          </a:stretch>
+        </p:blipFill>
+        <p:spPr>
+          <a:xfrm>
+            <a:off x="6680199" y="3429000"/>
+            <a:ext cx="4994779" cy="3129973"/>
+          </a:xfrm>
+          <a:prstGeom prst="rect">
+            <a:avLst/>
+          </a:prstGeom>
+        </p:spPr>
+      </p:pic>
+    </p:spTree>
+    <p:extLst>
+      <p:ext uri="{BB962C8B-B14F-4D97-AF65-F5344CB8AC3E}">
+        <p14:creationId xmlns:p14="http://schemas.microsoft.com/office/powerpoint/2010/main" val="601264121"/>
+      </p:ext>
+    </p:extLst>
+  </p:cSld>
+  <p:clrMapOvr>
+    <a:masterClrMapping/>
+  </p:clrMapOvr>
+</p:sld>
+</file>
+
+<file path=ppt/slides/slide7.xml><?xml version="1.0" encoding="utf-8"?>
+<p:sld xmlns:a="http://schemas.openxmlformats.org/drawingml/2006/main" xmlns:r="http://schemas.openxmlformats.org/officeDocument/2006/relationships" xmlns:p="http://schemas.openxmlformats.org/presentationml/2006/main">
+  <p:cSld>
+    <p:spTree>
+      <p:nvGrpSpPr>
+        <p:cNvPr id="1" name=""/>
+        <p:cNvGrpSpPr/>
+        <p:nvPr/>
+      </p:nvGrpSpPr>
+      <p:grpSpPr>
+        <a:xfrm>
+          <a:off x="0" y="0"/>
+          <a:ext cx="0" cy="0"/>
+          <a:chOff x="0" y="0"/>
+          <a:chExt cx="0" cy="0"/>
+        </a:xfrm>
+      </p:grpSpPr>
+      <p:sp>
+        <p:nvSpPr>
+          <p:cNvPr id="2" name="Cím 1">
+            <a:extLst>
+              <a:ext uri="{FF2B5EF4-FFF2-40B4-BE49-F238E27FC236}">
+                <a16:creationId xmlns:a16="http://schemas.microsoft.com/office/drawing/2014/main" id="{C15F932F-D3B3-4DBA-9292-26284556D56E}"/>
+              </a:ext>
+            </a:extLst>
+          </p:cNvPr>
+          <p:cNvSpPr>
+            <a:spLocks noGrp="1"/>
+          </p:cNvSpPr>
+          <p:nvPr>
+            <p:ph type="title"/>
+          </p:nvPr>
+        </p:nvSpPr>
+        <p:spPr/>
+        <p:txBody>
+          <a:bodyPr/>
+          <a:lstStyle/>
+          <a:p>
+            <a:r>
+              <a:rPr lang="hu-HU" dirty="0"/>
+              <a:t>Minta adatok</a:t>
+            </a:r>
+          </a:p>
+        </p:txBody>
+      </p:sp>
+      <p:sp>
+        <p:nvSpPr>
+          <p:cNvPr id="3" name="Tartalom helye 2">
+            <a:extLst>
+              <a:ext uri="{FF2B5EF4-FFF2-40B4-BE49-F238E27FC236}">
+                <a16:creationId xmlns:a16="http://schemas.microsoft.com/office/drawing/2014/main" id="{3C6CFD07-B3A9-40D7-8299-0B401157E455}"/>
+              </a:ext>
+            </a:extLst>
+          </p:cNvPr>
+          <p:cNvSpPr>
+            <a:spLocks noGrp="1"/>
+          </p:cNvSpPr>
+          <p:nvPr>
+            <p:ph idx="1"/>
+          </p:nvPr>
+        </p:nvSpPr>
+        <p:spPr/>
+        <p:txBody>
+          <a:bodyPr/>
+          <a:lstStyle/>
+          <a:p>
+            <a:r>
+              <a:rPr lang="hu-HU" dirty="0" err="1"/>
+              <a:t>Laravel</a:t>
+            </a:r>
+            <a:r>
+              <a:rPr lang="hu-HU" dirty="0"/>
+              <a:t> </a:t>
+            </a:r>
+            <a:r>
+              <a:rPr lang="hu-HU" dirty="0" err="1"/>
+              <a:t>factory</a:t>
+            </a:r>
+            <a:r>
+              <a:rPr lang="hu-HU" dirty="0"/>
+              <a:t> -&gt; </a:t>
+            </a:r>
+            <a:r>
+              <a:rPr lang="hu-HU"/>
+              <a:t>FakerPHP</a:t>
+            </a:r>
+            <a:endParaRPr lang="hu-HU" dirty="0"/>
+          </a:p>
+          <a:p>
+            <a:r>
+              <a:rPr lang="hu-HU" dirty="0"/>
+              <a:t>php </a:t>
+            </a:r>
+            <a:r>
+              <a:rPr lang="hu-HU" dirty="0" err="1"/>
+              <a:t>artisan</a:t>
+            </a:r>
+            <a:r>
+              <a:rPr lang="hu-HU" dirty="0"/>
+              <a:t> </a:t>
+            </a:r>
+            <a:r>
+              <a:rPr lang="hu-HU" dirty="0" err="1"/>
+              <a:t>migrate:fresh</a:t>
+            </a:r>
+            <a:r>
+              <a:rPr lang="hu-HU" dirty="0"/>
+              <a:t> --</a:t>
+            </a:r>
+            <a:r>
+              <a:rPr lang="hu-HU" dirty="0" err="1"/>
+              <a:t>seed</a:t>
+            </a:r>
+            <a:endParaRPr lang="hu-HU" dirty="0"/>
+          </a:p>
+        </p:txBody>
+      </p:sp>
+      <p:pic>
+        <p:nvPicPr>
+          <p:cNvPr id="5" name="Kép 4">
+            <a:extLst>
+              <a:ext uri="{FF2B5EF4-FFF2-40B4-BE49-F238E27FC236}">
+                <a16:creationId xmlns:a16="http://schemas.microsoft.com/office/drawing/2014/main" id="{7D453829-B06D-4A47-9984-B7E1ACFA7D91}"/>
+              </a:ext>
+            </a:extLst>
+          </p:cNvPr>
+          <p:cNvPicPr>
+            <a:picLocks noChangeAspect="1"/>
+          </p:cNvPicPr>
+          <p:nvPr/>
+        </p:nvPicPr>
+        <p:blipFill>
+          <a:blip r:embed="rId2">
+            <a:extLst>
+              <a:ext uri="{28A0092B-C50C-407E-A947-70E740481C1C}">
+                <a14:useLocalDpi xmlns:a14="http://schemas.microsoft.com/office/drawing/2010/main" val="0"/>
+              </a:ext>
+            </a:extLst>
+          </a:blip>
+          <a:stretch>
+            <a:fillRect/>
+          </a:stretch>
+        </p:blipFill>
+        <p:spPr>
+          <a:xfrm>
+            <a:off x="7360981" y="3530212"/>
+            <a:ext cx="3667637" cy="2781688"/>
+          </a:xfrm>
+          <a:prstGeom prst="rect">
+            <a:avLst/>
+          </a:prstGeom>
+        </p:spPr>
+      </p:pic>
+    </p:spTree>
+    <p:extLst>
+      <p:ext uri="{BB962C8B-B14F-4D97-AF65-F5344CB8AC3E}">
+        <p14:creationId xmlns:p14="http://schemas.microsoft.com/office/powerpoint/2010/main" val="3767964716"/>
+      </p:ext>
+    </p:extLst>
+  </p:cSld>
+  <p:clrMapOvr>
+    <a:masterClrMapping/>
+  </p:clrMapOvr>
+</p:sld>
+</file>
+
 <file path=ppt/theme/theme1.xml><?xml version="1.0" encoding="utf-8"?>
 <a:theme xmlns:a="http://schemas.openxmlformats.org/drawingml/2006/main" name="Office Theme">
   <a:themeElements>
